--- a/docs/presentation/ReviewPulse_AIA3.pptx
+++ b/docs/presentation/ReviewPulse_AIA3.pptx
@@ -7904,8 +7904,457 @@
 </p:sld>
 </file>
 
-<file path=ppt/slides/slide13.xml><?xml version="1.0" encoding="UTF-8" standalone="yes"?>-<p:sld xmlns:a="http://schemas.openxmlformats.org/drawingml/2006/main" xmlns:r="http://schemas.openxmlformats.org/officeDocument/2006/relationships" xmlns:mc="http://schemas.openxmlformats.org/markup-compatibility/2006" xmlns:mv="urn:schemas-microsoft-com:mac:vml" xmlns:p="http://schemas.openxmlformats.org/presentationml/2006/main" xmlns:c="http://schemas.openxmlformats.org/drawingml/2006/chart" xmlns:dgm="http://schemas.openxmlformats.org/drawingml/2006/diagram" xmlns:o="urn:schemas-microsoft-com:office:office" xmlns:v="urn:schemas-microsoft-com:vml" xmlns:pvml="urn:schemas-microsoft-com:office:powerpoint" xmlns:com="http://schemas.openxmlformats.org/drawingml/2006/compatibility" xmlns:p14="http://schemas.microsoft.com/office/powerpoint/2010/main" xmlns:p15="http://schemas.microsoft.com/office/powerpoint/2012/main" xmlns:ahyp="http://schemas.microsoft.com/office/drawing/2018/hyperlinkcolor"><p:cSld><p:spTree><p:nvGrpSpPr><p:cNvPr id="178" name="Shape 178"/><p:cNvGrpSpPr/><p:nvPr/></p:nvGrpSpPr><p:grpSpPr><a:xfrm><a:off x="0" y="0"/><a:ext cx="0" cy="0"/><a:chOff x="0" y="0"/><a:chExt cx="0" cy="0"/></a:xfrm></p:grpSpPr><p:sp><p:nvSpPr><p:cNvPr id="179" name="Google Shape;179;p25"/><p:cNvSpPr txBox="1"/><p:nvPr><p:ph idx="4294967295" type="ctrTitle"/></p:nvPr></p:nvSpPr><p:spPr><a:xfrm><a:off x="1192664" y="403309"/><a:ext cx="5315100" cy="533100"/></a:xfrm><a:prstGeom prst="rect"><a:avLst/></a:prstGeom><a:noFill/><a:ln><a:noFill/></a:ln></p:spPr><p:txBody><a:bodyPr anchorCtr="0" anchor="t" bIns="91425" lIns="91425" spcFirstLastPara="1" rIns="91425" wrap="square" tIns="91425"><a:noAutofit/></a:bodyPr><a:lstStyle/><a:p><a:pPr indent="0" lvl="0" marL="0" marR="0" rtl="0" algn="l"><a:lnSpc><a:spcPct val="100000"/></a:lnSpc><a:spcBef><a:spcPts val="0"/></a:spcBef><a:spcAft><a:spcPts val="0"/></a:spcAft><a:buClr><a:schemeClr val="dk1"/></a:buClr><a:buSzPts val="2800"/><a:buFont typeface="Arial"/><a:buNone/></a:pPr><a:r><a:rPr lang="fr" sz="2500"><a:solidFill><a:srgbClr val="0E3449"/></a:solidFill><a:latin typeface="Inter SemiBold"/><a:ea typeface="Inter SemiBold"/><a:cs typeface="Inter SemiBold"/><a:sym typeface="Inter SemiBold"/></a:rPr><a:t>Les choix d'infrastructure</a:t></a:r><a:endParaRPr i="0" sz="2500" u="none" cap="none" strike="noStrike"><a:solidFill><a:srgbClr val="0E3449"/></a:solidFill><a:latin typeface="Inter SemiBold"/><a:ea typeface="Inter SemiBold"/><a:cs typeface="Inter SemiBold"/><a:sym typeface="Inter SemiBold"/></a:endParaRPr></a:p></p:txBody></p:sp><p:sp><p:nvSpPr><p:cNvPr id="180" name="Google Shape;180;p25"/><p:cNvSpPr/><p:nvPr/></p:nvSpPr><p:spPr><a:xfrm><a:off x="10225" y="4892025"/><a:ext cx="9144000" cy="251400"/></a:xfrm><a:prstGeom prst="rect"><a:avLst/></a:prstGeom><a:solidFill><a:srgbClr val="C3FFFC"/></a:solidFill><a:ln><a:noFill/></a:ln></p:spPr><p:txBody><a:bodyPr anchorCtr="0" anchor="ctr" bIns="91425" lIns="91425" spcFirstLastPara="1" rIns="91425" wrap="square" tIns="91425"><a:noAutofit/></a:bodyPr><a:lstStyle/><a:p><a:pPr indent="0" lvl="0" marL="0" marR="0" rtl="0" algn="l"><a:lnSpc><a:spcPct val="100000"/></a:lnSpc><a:spcBef><a:spcPts val="0"/></a:spcBef><a:spcAft><a:spcPts val="0"/></a:spcAft><a:buClr><a:srgbClr val="000000"/></a:buClr><a:buSzPts val="1400"/><a:buFont typeface="Arial"/><a:buNone/></a:pPr><a:r><a:t></a:t></a:r><a:endParaRPr b="0" i="0" sz="1400" u="none" cap="none" strike="noStrike"><a:solidFill><a:srgbClr val="000000"/></a:solidFill><a:latin typeface="Arial"/><a:ea typeface="Arial"/><a:cs typeface="Arial"/><a:sym typeface="Arial"/></a:endParaRPr></a:p></p:txBody></p:sp><p:pic><p:nvPicPr><p:cNvPr id="181" name="Google Shape;181;p25"/><p:cNvPicPr preferRelativeResize="0"/><p:nvPr/></p:nvPicPr><p:blipFill rotWithShape="1"><a:blip r:embed="rId3"><a:alphaModFix/></a:blip><a:srcRect b="0" l="0" r="0" t="0"/><a:stretch/></p:blipFill><p:spPr><a:xfrm><a:off x="463375" y="482852"/><a:ext cx="576900" cy="385904"/></a:xfrm><a:prstGeom prst="rect"><a:avLst/></a:prstGeom><a:noFill/><a:ln><a:noFill/></a:ln></p:spPr></p:pic><p:sp><p:nvSpPr><p:cNvPr id="182" name="Google Shape;182;p25"/><p:cNvSpPr txBox="1"/><p:nvPr/></p:nvSpPr><p:spPr><a:xfrm><a:off x="1261450" y="1017575"/><a:ext cx="1902900" cy="461700"/></a:xfrm><a:prstGeom prst="rect"><a:avLst/></a:prstGeom><a:noFill/><a:ln><a:noFill/></a:ln></p:spPr><p:txBody><a:bodyPr anchorCtr="0" anchor="t" bIns="91425" lIns="91425" spcFirstLastPara="1" rIns="91425" wrap="square" tIns="91425"><a:spAutoFit/></a:bodyPr><a:lstStyle/><a:p><a:pPr indent="0" lvl="0" marL="0" rtl="0" algn="l"><a:spcBef><a:spcPts val="0"/></a:spcBef><a:spcAft><a:spcPts val="0"/></a:spcAft><a:buNone/></a:pPr><a:r><a:rPr lang="fr" sz="1800"><a:solidFill><a:schemeClr val="dk2"/></a:solidFill></a:rPr><a:t>Une seule pile, deux environnements</a:t></a:r><a:endParaRPr sz="1800"><a:solidFill><a:schemeClr val="dk2"/></a:solidFill></a:endParaRPr></a:p></p:txBody></p:sp><p:sp><p:nvSpPr><p:cNvPr id="183" name="Google Shape;183;p25"/><p:cNvSpPr/><p:nvPr/></p:nvSpPr><p:spPr><a:xfrm><a:off x="650300" y="1861675"/><a:ext cx="2382600" cy="1248600"/></a:xfrm><a:prstGeom prst="roundRect"><a:avLst><a:gd fmla="val 11687" name="adj"/></a:avLst></a:prstGeom><a:solidFill><a:srgbClr val="FFFFFF"/></a:solidFill><a:ln cap="flat" cmpd="sng" w="9525"><a:solidFill><a:srgbClr val="FF7047"/></a:solidFill><a:prstDash val="solid"/><a:round/><a:headEnd len="sm" w="sm" type="none"/><a:tailEnd len="sm" w="sm" type="none"/>Conteneurs : une image applicative, une image Airflow, une image de développement</a:t></a:r><a:endParaRPr/></a:p></p:txBody></p:sp><p:sp><p:nvSpPr><p:cNvPr id="184" name="Google Shape;184;p25"/><p:cNvSpPr/><p:nvPr/></p:nvSpPr><p:spPr><a:xfrm><a:off x="3264775" y="1861675"/><a:ext cx="1856100" cy="1248600"/></a:xfrm><a:prstGeom prst="roundRect"><a:avLst><a:gd fmla="val 11687" name="adj"/></a:avLst></a:prstGeom><a:solidFill><a:srgbClr val="FFFFFF"/></a:solidFill><a:ln cap="flat" cmpd="sng" w="9525"><a:solidFill><a:srgbClr val="FF7047"/></a:solidFill><a:prstDash val="solid"/><a:round/><a:headEnd len="sm" w="sm" type="none"/><a:tailEnd len="sm" w="sm" type="none"/>Zone silver : collecte &amp; stockage – ingest.py, zone brute immuable, idempotence par curseur</a:t></a:r><a:r><a:rPr lang="fr" sz="1650"><a:solidFill><a:srgbClr val="55575A"/></a:solidFill><a:latin typeface="Manrope"/><a:ea typeface="Manrope"/><a:cs typeface="Manrope"/><a:sym typeface="Manrope"/></a:rPr><a:t>PySpark 4 et Iceberg, chaque écriture crée un instantané restaurable – ETL vers silver</a:t></a:r><a:endParaRPr/></a:p></p:txBody></p:sp><p:sp><p:nvSpPr><p:cNvPr id="185" name="Google Shape;185;p25"/><p:cNvSpPr/><p:nvPr/></p:nvSpPr><p:spPr><a:xfrm><a:off x="5352750" y="1861675"/><a:ext cx="2877300" cy="1248600"/></a:xfrm><a:prstGeom prst="roundRect"><a:avLst><a:gd fmla="val 11687" name="adj"/></a:avLst></a:prstGeom><a:solidFill><a:srgbClr val="FFFFFF"/></a:solidFill><a:ln cap="flat" cmpd="sng" w="9525"><a:solidFill><a:srgbClr val="FF7047"/></a:solidFill><a:prstDash val="solid"/><a:round/><a:headEnd len="sm" w="sm" type="none"/><a:tailEnd len="sm" w="sm" type="none"/>Zone gold : consommation – score.py API FastAPI</a:t></a:r><a:br><a:rPr b="1" lang="fr" sz="1650"><a:solidFill><a:srgbClr val="55575A"/></a:solidFill><a:latin typeface="Manrope"/><a:ea typeface="Manrope"/><a:cs typeface="Manrope"/><a:sym typeface="Manrope"/></a:rPr></a:br><a:r><a:rPr lang="fr" sz="1650"><a:solidFill><a:srgbClr val="55575A"/></a:solidFill><a:latin typeface="Manrope"/><a:ea typeface="Manrope"/><a:cs typeface="Manrope"/><a:sym typeface="Manrope"/></a:rPr><a:t>Zone gold : dbt sur DuckDB — aucun service externe, donc aucune dépendance le jour J. ADR 0013, 0014, 0017.</a:t></a:r><a:endParaRPr/></a:p></p:txBody></p:sp></p:spTree></p:cSld><p:clrMapOvr><a:masterClrMapping/></p:clrMapOvr></p:sld>
+<file path=ppt/slides/slide13.xml><?xml version="1.0" encoding="utf-8"?>
+<p:sld xmlns:a="http://schemas.openxmlformats.org/drawingml/2006/main" xmlns:r="http://schemas.openxmlformats.org/officeDocument/2006/relationships" xmlns:mc="http://schemas.openxmlformats.org/markup-compatibility/2006" xmlns:mv="urn:schemas-microsoft-com:mac:vml" xmlns:p="http://schemas.openxmlformats.org/presentationml/2006/main" xmlns:c="http://schemas.openxmlformats.org/drawingml/2006/chart" xmlns:dgm="http://schemas.openxmlformats.org/drawingml/2006/diagram" xmlns:o="urn:schemas-microsoft-com:office:office" xmlns:v="urn:schemas-microsoft-com:vml" xmlns:pvml="urn:schemas-microsoft-com:office:powerpoint" xmlns:com="http://schemas.openxmlformats.org/drawingml/2006/compatibility" xmlns:p14="http://schemas.microsoft.com/office/powerpoint/2010/main" xmlns:p15="http://schemas.microsoft.com/office/powerpoint/2012/main" xmlns:ahyp="http://schemas.microsoft.com/office/drawing/2018/hyperlinkcolor">
+  <p:cSld>
+    <p:spTree>
+      <p:nvGrpSpPr>
+        <p:cNvPr id="178" name="Shape 178"/>
+        <p:cNvGrpSpPr/>
+        <p:nvPr/>
+      </p:nvGrpSpPr>
+      <p:grpSpPr>
+        <a:xfrm>
+          <a:off x="0" y="0"/>
+          <a:ext cx="0" cy="0"/>
+          <a:chOff x="0" y="0"/>
+          <a:chExt cx="0" cy="0"/>
+        </a:xfrm>
+      </p:grpSpPr>
+      <p:sp>
+        <p:nvSpPr>
+          <p:cNvPr id="179" name="Google Shape;179;p25"/>
+          <p:cNvSpPr txBox="1"/>
+          <p:nvPr>
+            <p:ph idx="4294967295" type="ctrTitle"/>
+          </p:nvPr>
+        </p:nvSpPr>
+        <p:spPr>
+          <a:xfrm>
+            <a:off x="1192664" y="403309"/>
+            <a:ext cx="5315100" cy="533100"/>
+          </a:xfrm>
+          <a:prstGeom prst="rect">
+            <a:avLst/>
+          </a:prstGeom>
+          <a:noFill/>
+          <a:ln>
+            <a:noFill/>
+          </a:ln>
+        </p:spPr>
+        <p:txBody>
+          <a:bodyPr anchorCtr="0" anchor="t" bIns="91425" lIns="91425" spcFirstLastPara="1" rIns="91425" wrap="square" tIns="91425">
+            <a:noAutofit/>
+          </a:bodyPr>
+          <a:lstStyle/>
+          <a:p>
+            <a:pPr indent="0" lvl="0" marL="0" marR="0" rtl="0" algn="l">
+              <a:lnSpc>
+                <a:spcPct val="100000"/>
+              </a:lnSpc>
+              <a:spcBef>
+                <a:spcPts val="0"/>
+              </a:spcBef>
+              <a:spcAft>
+                <a:spcPts val="0"/>
+              </a:spcAft>
+              <a:buClr>
+                <a:schemeClr val="dk1"/>
+              </a:buClr>
+              <a:buSzPts val="2800"/>
+              <a:buFont typeface="Arial"/>
+              <a:buNone/>
+            </a:pPr>
+            <a:r>
+              <a:rPr lang="fr" sz="2500">
+                <a:solidFill>
+                  <a:srgbClr val="0E3449"/>
+                </a:solidFill>
+                <a:latin typeface="Inter SemiBold"/>
+                <a:ea typeface="Inter SemiBold"/>
+                <a:cs typeface="Inter SemiBold"/>
+                <a:sym typeface="Inter SemiBold"/>
+              </a:rPr>
+              <a:t>Les choix d'infrastructure</a:t>
+            </a:r>
+            <a:endParaRPr i="0" sz="2500" u="none" cap="none" strike="noStrike">
+              <a:solidFill>
+                <a:srgbClr val="0E3449"/>
+              </a:solidFill>
+              <a:latin typeface="Inter SemiBold"/>
+              <a:ea typeface="Inter SemiBold"/>
+              <a:cs typeface="Inter SemiBold"/>
+              <a:sym typeface="Inter SemiBold"/>
+            </a:endParaRPr>
+          </a:p>
+        </p:txBody>
+      </p:sp>
+      <p:sp>
+        <p:nvSpPr>
+          <p:cNvPr id="180" name="Google Shape;180;p25"/>
+          <p:cNvSpPr/>
+          <p:nvPr/>
+        </p:nvSpPr>
+        <p:spPr>
+          <a:xfrm>
+            <a:off x="10225" y="4892025"/>
+            <a:ext cx="9144000" cy="251400"/>
+          </a:xfrm>
+          <a:prstGeom prst="rect">
+            <a:avLst/>
+          </a:prstGeom>
+          <a:solidFill>
+            <a:srgbClr val="C3FFFC"/>
+          </a:solidFill>
+          <a:ln>
+            <a:noFill/>
+          </a:ln>
+        </p:spPr>
+        <p:txBody>
+          <a:bodyPr anchorCtr="0" anchor="ctr" bIns="91425" lIns="91425" spcFirstLastPara="1" rIns="91425" wrap="square" tIns="91425">
+            <a:noAutofit/>
+          </a:bodyPr>
+          <a:lstStyle/>
+          <a:p>
+            <a:pPr indent="0" lvl="0" marL="0" marR="0" rtl="0" algn="l">
+              <a:lnSpc>
+                <a:spcPct val="100000"/>
+              </a:lnSpc>
+              <a:spcBef>
+                <a:spcPts val="0"/>
+              </a:spcBef>
+              <a:spcAft>
+                <a:spcPts val="0"/>
+              </a:spcAft>
+              <a:buClr>
+                <a:srgbClr val="000000"/>
+              </a:buClr>
+              <a:buSzPts val="1400"/>
+              <a:buFont typeface="Arial"/>
+              <a:buNone/>
+            </a:pPr>
+            <a:r>
+              <a:t/>
+            </a:r>
+            <a:endParaRPr b="0" i="0" sz="1400" u="none" cap="none" strike="noStrike">
+              <a:solidFill>
+                <a:srgbClr val="000000"/>
+              </a:solidFill>
+              <a:latin typeface="Arial"/>
+              <a:ea typeface="Arial"/>
+              <a:cs typeface="Arial"/>
+              <a:sym typeface="Arial"/>
+            </a:endParaRPr>
+          </a:p>
+        </p:txBody>
+      </p:sp>
+      <p:pic>
+        <p:nvPicPr>
+          <p:cNvPr id="181" name="Google Shape;181;p25"/>
+          <p:cNvPicPr preferRelativeResize="0"/>
+          <p:nvPr/>
+        </p:nvPicPr>
+        <p:blipFill rotWithShape="1">
+          <a:blip r:embed="rId3">
+            <a:alphaModFix/>
+          </a:blip>
+          <a:srcRect b="0" l="0" r="0" t="0"/>
+          <a:stretch/>
+        </p:blipFill>
+        <p:spPr>
+          <a:xfrm>
+            <a:off x="463375" y="482852"/>
+            <a:ext cx="576900" cy="385904"/>
+          </a:xfrm>
+          <a:prstGeom prst="rect">
+            <a:avLst/>
+          </a:prstGeom>
+          <a:noFill/>
+          <a:ln>
+            <a:noFill/>
+          </a:ln>
+        </p:spPr>
+      </p:pic>
+      <p:sp>
+        <p:nvSpPr>
+          <p:cNvPr id="182" name="Google Shape;182;p25"/>
+          <p:cNvSpPr txBox="1"/>
+          <p:nvPr/>
+        </p:nvSpPr>
+        <p:spPr>
+          <a:xfrm>
+            <a:off x="1261450" y="1017575"/>
+            <a:ext cx="1902900" cy="461700"/>
+          </a:xfrm>
+          <a:prstGeom prst="rect">
+            <a:avLst/>
+          </a:prstGeom>
+          <a:noFill/>
+          <a:ln>
+            <a:noFill/>
+          </a:ln>
+        </p:spPr>
+        <p:txBody>
+          <a:bodyPr anchorCtr="0" anchor="t" bIns="91425" lIns="91425" spcFirstLastPara="1" rIns="91425" wrap="square" tIns="91425">
+            <a:spAutoFit/>
+          </a:bodyPr>
+          <a:lstStyle/>
+          <a:p>
+            <a:pPr indent="0" lvl="0" marL="0" rtl="0" algn="l">
+              <a:spcBef>
+                <a:spcPts val="0"/>
+              </a:spcBef>
+              <a:spcAft>
+                <a:spcPts val="0"/>
+              </a:spcAft>
+              <a:buNone/>
+            </a:pPr>
+            <a:r>
+              <a:rPr lang="fr" sz="1800">
+                <a:solidFill>
+                  <a:schemeClr val="dk2"/>
+                </a:solidFill>
+              </a:rPr>
+              <a:t>Une seule pile, deux environnements</a:t>
+            </a:r>
+            <a:endParaRPr sz="1800">
+              <a:solidFill>
+                <a:schemeClr val="dk2"/>
+              </a:solidFill>
+            </a:endParaRPr>
+          </a:p>
+        </p:txBody>
+      </p:sp>
+      <p:sp>
+        <p:nvSpPr>
+          <p:cNvPr id="183" name="Google Shape;183;p25"/>
+          <p:cNvSpPr/>
+          <p:nvPr/>
+        </p:nvSpPr>
+        <p:spPr>
+          <a:xfrm>
+            <a:off x="650300" y="1861675"/>
+            <a:ext cx="2382600" cy="1248600"/>
+          </a:xfrm>
+          <a:prstGeom prst="roundRect">
+            <a:avLst>
+              <a:gd fmla="val 11687" name="adj"/>
+            </a:avLst>
+          </a:prstGeom>
+          <a:solidFill>
+            <a:srgbClr val="FFFFFF"/>
+          </a:solidFill>
+          <a:ln cap="flat" cmpd="sng" w="9525">
+            <a:solidFill>
+              <a:srgbClr val="FF7047"/>
+            </a:solidFill>
+            <a:prstDash val="solid"/>
+            <a:round/>
+            <a:headEnd len="sm" w="sm" type="none"/>
+            <a:tailEnd len="sm" w="sm" type="none"/>
+          </a:ln>
+        </p:spPr>
+        <p:txBody>
+          <a:bodyPr anchorCtr="0" anchor="ctr" bIns="91425" lIns="91425" spcFirstLastPara="1" rIns="91425" wrap="square" tIns="91425">
+            <a:noAutofit/>
+          </a:bodyPr>
+          <a:lstStyle/>
+          <a:p>
+            <a:pPr indent="0" lvl="0" marL="0" rtl="0" algn="l">
+              <a:lnSpc>
+                <a:spcPct val="157575"/>
+              </a:lnSpc>
+              <a:spcBef>
+                <a:spcPts val="0"/>
+              </a:spcBef>
+              <a:spcAft>
+                <a:spcPts val="0"/>
+              </a:spcAft>
+              <a:buNone/>
+            </a:pPr>
+            <a:r>
+              <a:rPr b="1" lang="fr" sz="1650">
+                <a:solidFill>
+                  <a:srgbClr val="55575A"/>
+                </a:solidFill>
+                <a:latin typeface="Manrope"/>
+                <a:ea typeface="Manrope"/>
+                <a:cs typeface="Manrope"/>
+                <a:sym typeface="Manrope"/>
+              </a:rPr>
+              <a:t>Conteneurs : une image applicative, une image Airflow, une image de développement</a:t>
+            </a:r>
+            <a:endParaRPr/>
+          </a:p>
+        </p:txBody>
+      </p:sp>
+      <p:sp>
+        <p:nvSpPr>
+          <p:cNvPr id="184" name="Google Shape;184;p25"/>
+          <p:cNvSpPr/>
+          <p:nvPr/>
+        </p:nvSpPr>
+        <p:spPr>
+          <a:xfrm>
+            <a:off x="3264775" y="1861675"/>
+            <a:ext cx="1856100" cy="1248600"/>
+          </a:xfrm>
+          <a:prstGeom prst="roundRect">
+            <a:avLst>
+              <a:gd fmla="val 11687" name="adj"/>
+            </a:avLst>
+          </a:prstGeom>
+          <a:solidFill>
+            <a:srgbClr val="FFFFFF"/>
+          </a:solidFill>
+          <a:ln cap="flat" cmpd="sng" w="9525">
+            <a:solidFill>
+              <a:srgbClr val="FF7047"/>
+            </a:solidFill>
+            <a:prstDash val="solid"/>
+            <a:round/>
+            <a:headEnd len="sm" w="sm" type="none"/>
+            <a:tailEnd len="sm" w="sm" type="none"/>
+          </a:ln>
+        </p:spPr>
+        <p:txBody>
+          <a:bodyPr anchorCtr="0" anchor="ctr" bIns="91425" lIns="91425" spcFirstLastPara="1" rIns="91425" wrap="square" tIns="91425">
+            <a:noAutofit/>
+          </a:bodyPr>
+          <a:lstStyle/>
+          <a:p>
+            <a:pPr indent="0" lvl="0" marL="0" rtl="0" algn="l">
+              <a:lnSpc>
+                <a:spcPct val="157575"/>
+              </a:lnSpc>
+              <a:spcBef>
+                <a:spcPts val="0"/>
+              </a:spcBef>
+              <a:spcAft>
+                <a:spcPts val="0"/>
+              </a:spcAft>
+              <a:buNone/>
+            </a:pPr>
+            <a:r>
+              <a:rPr b="1" lang="fr" sz="1650">
+                <a:solidFill>
+                  <a:srgbClr val="55575A"/>
+                </a:solidFill>
+                <a:latin typeface="Manrope"/>
+                <a:ea typeface="Manrope"/>
+                <a:cs typeface="Manrope"/>
+                <a:sym typeface="Manrope"/>
+              </a:rPr>
+              <a:t>Zone silver : collecte &amp; stockage – ingest.py, zone brute immuable, idempotence par curseur</a:t>
+            </a:r>
+            <a:r>
+              <a:rPr lang="fr" sz="1650">
+                <a:solidFill>
+                  <a:srgbClr val="55575A"/>
+                </a:solidFill>
+                <a:latin typeface="Manrope"/>
+                <a:ea typeface="Manrope"/>
+                <a:cs typeface="Manrope"/>
+                <a:sym typeface="Manrope"/>
+              </a:rPr>
+              <a:t>PySpark 4 et Iceberg, chaque écriture crée un instantané restaurable – ETL vers silver</a:t>
+            </a:r>
+            <a:endParaRPr/>
+          </a:p>
+        </p:txBody>
+      </p:sp>
+      <p:sp>
+        <p:nvSpPr>
+          <p:cNvPr id="185" name="Google Shape;185;p25"/>
+          <p:cNvSpPr/>
+          <p:nvPr/>
+        </p:nvSpPr>
+        <p:spPr>
+          <a:xfrm>
+            <a:off x="5352750" y="1861675"/>
+            <a:ext cx="2877300" cy="1248600"/>
+          </a:xfrm>
+          <a:prstGeom prst="roundRect">
+            <a:avLst>
+              <a:gd fmla="val 11687" name="adj"/>
+            </a:avLst>
+          </a:prstGeom>
+          <a:solidFill>
+            <a:srgbClr val="FFFFFF"/>
+          </a:solidFill>
+          <a:ln cap="flat" cmpd="sng" w="9525">
+            <a:solidFill>
+              <a:srgbClr val="FF7047"/>
+            </a:solidFill>
+            <a:prstDash val="solid"/>
+            <a:round/>
+            <a:headEnd len="sm" w="sm" type="none"/>
+            <a:tailEnd len="sm" w="sm" type="none"/>
+          </a:ln>
+        </p:spPr>
+        <p:txBody>
+          <a:bodyPr anchorCtr="0" anchor="ctr" bIns="91425" lIns="91425" spcFirstLastPara="1" rIns="91425" wrap="square" tIns="91425">
+            <a:noAutofit/>
+          </a:bodyPr>
+          <a:lstStyle/>
+          <a:p>
+            <a:pPr indent="0" lvl="0" marL="0" rtl="0" algn="l">
+              <a:lnSpc>
+                <a:spcPct val="157575"/>
+              </a:lnSpc>
+              <a:spcBef>
+                <a:spcPts val="0"/>
+              </a:spcBef>
+              <a:spcAft>
+                <a:spcPts val="0"/>
+              </a:spcAft>
+              <a:buNone/>
+            </a:pPr>
+            <a:r>
+              <a:rPr b="1" lang="fr" sz="1650">
+                <a:solidFill>
+                  <a:srgbClr val="55575A"/>
+                </a:solidFill>
+                <a:latin typeface="Manrope"/>
+                <a:ea typeface="Manrope"/>
+                <a:cs typeface="Manrope"/>
+                <a:sym typeface="Manrope"/>
+              </a:rPr>
+              <a:t>Zone gold : consommation – score.py API FastAPI</a:t>
+            </a:r>
+            <a:br>
+              <a:rPr b="1" lang="fr" sz="1650">
+                <a:solidFill>
+                  <a:srgbClr val="55575A"/>
+                </a:solidFill>
+                <a:latin typeface="Manrope"/>
+                <a:ea typeface="Manrope"/>
+                <a:cs typeface="Manrope"/>
+                <a:sym typeface="Manrope"/>
+              </a:rPr>
+            </a:br>
+            <a:r>
+              <a:rPr lang="fr" sz="1650">
+                <a:solidFill>
+                  <a:srgbClr val="55575A"/>
+                </a:solidFill>
+                <a:latin typeface="Manrope"/>
+                <a:ea typeface="Manrope"/>
+                <a:cs typeface="Manrope"/>
+                <a:sym typeface="Manrope"/>
+              </a:rPr>
+              <a:t>Zone gold : dbt sur DuckDB — aucun service externe, donc aucune dépendance le jour J. ADR 0013, 0014, 0017.</a:t>
+            </a:r>
+            <a:endParaRPr/>
+          </a:p>
+        </p:txBody>
+      </p:sp>
+    </p:spTree>
+  </p:cSld>
+  <p:clrMapOvr>
+    <a:masterClrMapping/>
+  </p:clrMapOvr>
+</p:sld>
 </file>
 
 <file path=ppt/slides/slide15.xml><?xml version="1.0" encoding="utf-8"?>
